--- a/02_FullTimeJob/AlignHCM/win-stories/world-central-kitchen/WCK_Win_Story.pptx
+++ b/02_FullTimeJob/AlignHCM/win-stories/world-central-kitchen/WCK_Win_Story.pptx
@@ -946,148 +946,9 @@
           <a:ln/>
         </p:spPr>
       </p:sp>
-      <p:sp>
-        <p:nvSpPr>
-          <p:cNvPr id="5" name="Shape 3"/>
-          <p:cNvSpPr/>
-          <p:nvPr/>
-        </p:nvSpPr>
-        <p:spPr>
-          <a:xfrm>
-            <a:off x="566928" y="402336"/>
-            <a:ext cx="932688" cy="219456"/>
-          </a:xfrm>
-          <a:prstGeom prst="roundRect">
-            <a:avLst>
-              <a:gd name="adj" fmla="val 20833"/>
-            </a:avLst>
-          </a:prstGeom>
-          <a:solidFill>
-            <a:srgbClr val="E0652F"/>
-          </a:solidFill>
-          <a:ln/>
-        </p:spPr>
-      </p:sp>
-      <p:sp>
-        <p:nvSpPr>
-          <p:cNvPr id="6" name="Text 4"/>
-          <p:cNvSpPr/>
-          <p:nvPr/>
-        </p:nvSpPr>
-        <p:spPr>
-          <a:xfrm>
-            <a:off x="566928" y="402336"/>
-            <a:ext cx="932688" cy="219456"/>
-          </a:xfrm>
-          <a:prstGeom prst="rect">
-            <a:avLst/>
-          </a:prstGeom>
-          <a:noFill/>
-          <a:ln/>
-        </p:spPr>
-        <p:txBody>
-          <a:bodyPr wrap="square" lIns="0" tIns="0" rIns="0" bIns="0" rtlCol="0" anchor="ctr"/>
-          <a:lstStyle/>
-          <a:p>
-            <a:pPr algn="ctr" indent="0" marL="0">
-              <a:buNone/>
-            </a:pPr>
-            <a:r>
-              <a:rPr lang="en-US" sz="850" b="1" spc="100" kern="0" dirty="0">
-                <a:solidFill>
-                  <a:srgbClr val="FFFFFF"/>
-                </a:solidFill>
-                <a:latin typeface="Calibri" pitchFamily="34" charset="0"/>
-                <a:ea typeface="Calibri" pitchFamily="34" charset="-122"/>
-                <a:cs typeface="Calibri" pitchFamily="34" charset="-120"/>
-              </a:rPr>
-              <a:t>WIN STORY</a:t>
-            </a:r>
-            <a:endParaRPr lang="en-US" sz="850" dirty="0"/>
-          </a:p>
-        </p:txBody>
-      </p:sp>
-      <p:sp>
-        <p:nvSpPr>
-          <p:cNvPr id="7" name="Text 5"/>
-          <p:cNvSpPr/>
-          <p:nvPr/>
-        </p:nvSpPr>
-        <p:spPr>
-          <a:xfrm>
-            <a:off x="566928" y="640080"/>
-            <a:ext cx="7863840" cy="420624"/>
-          </a:xfrm>
-          <a:prstGeom prst="rect">
-            <a:avLst/>
-          </a:prstGeom>
-          <a:noFill/>
-          <a:ln/>
-        </p:spPr>
-        <p:txBody>
-          <a:bodyPr wrap="square" lIns="0" tIns="0" rIns="0" bIns="0" rtlCol="0" anchor="ctr"/>
-          <a:lstStyle/>
-          <a:p>
-            <a:pPr algn="l" indent="0" marL="0">
-              <a:buNone/>
-            </a:pPr>
-            <a:r>
-              <a:rPr lang="en-US" sz="2400" b="1" spc="50" kern="0" dirty="0">
-                <a:solidFill>
-                  <a:srgbClr val="FFFFFF"/>
-                </a:solidFill>
-                <a:latin typeface="Calibri" pitchFamily="34" charset="0"/>
-                <a:ea typeface="Calibri" pitchFamily="34" charset="-122"/>
-                <a:cs typeface="Calibri" pitchFamily="34" charset="-120"/>
-              </a:rPr>
-              <a:t>WORLD CENTRAL KITCHEN</a:t>
-            </a:r>
-            <a:endParaRPr lang="en-US" sz="2400" dirty="0"/>
-          </a:p>
-        </p:txBody>
-      </p:sp>
-      <p:sp>
-        <p:nvSpPr>
-          <p:cNvPr id="8" name="Text 6"/>
-          <p:cNvSpPr/>
-          <p:nvPr/>
-        </p:nvSpPr>
-        <p:spPr>
-          <a:xfrm>
-            <a:off x="566928" y="1051560"/>
-            <a:ext cx="7863840" cy="219456"/>
-          </a:xfrm>
-          <a:prstGeom prst="rect">
-            <a:avLst/>
-          </a:prstGeom>
-          <a:noFill/>
-          <a:ln/>
-        </p:spPr>
-        <p:txBody>
-          <a:bodyPr wrap="square" lIns="0" tIns="0" rIns="0" bIns="0" rtlCol="0" anchor="ctr"/>
-          <a:lstStyle/>
-          <a:p>
-            <a:pPr algn="l" indent="0" marL="0">
-              <a:buNone/>
-            </a:pPr>
-            <a:r>
-              <a:rPr lang="en-US" sz="1050" i="1" dirty="0">
-                <a:solidFill>
-                  <a:srgbClr val="C7D2E0"/>
-                </a:solidFill>
-                <a:latin typeface="Calibri" pitchFamily="34" charset="0"/>
-                <a:ea typeface="Calibri" pitchFamily="34" charset="-122"/>
-                <a:cs typeface="Calibri" pitchFamily="34" charset="-120"/>
-              </a:rPr>
-              <a:t>Dayforce Full-Suite Implementation   |   Nonprofit   |   Global Humanitarian</a:t>
-            </a:r>
-            <a:endParaRPr lang="en-US" sz="1050" dirty="0"/>
-          </a:p>
-        </p:txBody>
-      </p:sp>
       <p:pic>
         <p:nvPicPr>
-          <p:cNvPr id="9" name="Image 0" descr="/home/user/dillon-os/02_FullTimeJob/AlignHCM/win-stories/world-central-kitchen/assets/dayforce_logo.png">    </p:cNvPr>
+          <p:cNvPr id="5" name="Image 0" descr="/home/user/dillon-os/02_FullTimeJob/AlignHCM/win-stories/world-central-kitchen/assets/wck_logo.png">    </p:cNvPr>
           <p:cNvPicPr>
             <a:picLocks noChangeAspect="1"/>
           </p:cNvPicPr>
@@ -1101,17 +962,117 @@
         </p:blipFill>
         <p:spPr>
           <a:xfrm>
-            <a:off x="10692079" y="581101"/>
-            <a:ext cx="932688" cy="392278"/>
+            <a:off x="566928" y="448056"/>
+            <a:ext cx="1158728" cy="658368"/>
           </a:xfrm>
           <a:prstGeom prst="rect">
             <a:avLst/>
           </a:prstGeom>
         </p:spPr>
       </p:pic>
+      <p:sp>
+        <p:nvSpPr>
+          <p:cNvPr id="6" name="Text 3"/>
+          <p:cNvSpPr/>
+          <p:nvPr/>
+        </p:nvSpPr>
+        <p:spPr>
+          <a:xfrm>
+            <a:off x="1999976" y="274320"/>
+            <a:ext cx="5486400" cy="1005840"/>
+          </a:xfrm>
+          <a:prstGeom prst="rect">
+            <a:avLst/>
+          </a:prstGeom>
+          <a:noFill/>
+          <a:ln/>
+        </p:spPr>
+        <p:txBody>
+          <a:bodyPr wrap="square" lIns="0" tIns="0" rIns="0" bIns="0" rtlCol="0" anchor="ctr"/>
+          <a:lstStyle/>
+          <a:p>
+            <a:pPr algn="l" indent="0" marL="0">
+              <a:buNone/>
+            </a:pPr>
+            <a:r>
+              <a:rPr lang="en-US" sz="1050" i="1" dirty="0">
+                <a:solidFill>
+                  <a:srgbClr val="C7D2E0"/>
+                </a:solidFill>
+                <a:latin typeface="Calibri" pitchFamily="34" charset="0"/>
+                <a:ea typeface="Calibri" pitchFamily="34" charset="-122"/>
+                <a:cs typeface="Calibri" pitchFamily="34" charset="-120"/>
+              </a:rPr>
+              <a:t>Dayforce Full-Suite Implementation   |   Nonprofit   |   Global Humanitarian</a:t>
+            </a:r>
+            <a:endParaRPr lang="en-US" sz="1050" dirty="0"/>
+          </a:p>
+        </p:txBody>
+      </p:sp>
+      <p:sp>
+        <p:nvSpPr>
+          <p:cNvPr id="7" name="Shape 4"/>
+          <p:cNvSpPr/>
+          <p:nvPr/>
+        </p:nvSpPr>
+        <p:spPr>
+          <a:xfrm>
+            <a:off x="10692079" y="365760"/>
+            <a:ext cx="932688" cy="219456"/>
+          </a:xfrm>
+          <a:prstGeom prst="roundRect">
+            <a:avLst>
+              <a:gd name="adj" fmla="val 20833"/>
+            </a:avLst>
+          </a:prstGeom>
+          <a:solidFill>
+            <a:srgbClr val="E0652F"/>
+          </a:solidFill>
+          <a:ln/>
+        </p:spPr>
+      </p:sp>
+      <p:sp>
+        <p:nvSpPr>
+          <p:cNvPr id="8" name="Text 5"/>
+          <p:cNvSpPr/>
+          <p:nvPr/>
+        </p:nvSpPr>
+        <p:spPr>
+          <a:xfrm>
+            <a:off x="10692079" y="365760"/>
+            <a:ext cx="932688" cy="219456"/>
+          </a:xfrm>
+          <a:prstGeom prst="rect">
+            <a:avLst/>
+          </a:prstGeom>
+          <a:noFill/>
+          <a:ln/>
+        </p:spPr>
+        <p:txBody>
+          <a:bodyPr wrap="square" lIns="0" tIns="0" rIns="0" bIns="0" rtlCol="0" anchor="ctr"/>
+          <a:lstStyle/>
+          <a:p>
+            <a:pPr algn="ctr" indent="0" marL="0">
+              <a:buNone/>
+            </a:pPr>
+            <a:r>
+              <a:rPr lang="en-US" sz="850" b="1" spc="100" kern="0" dirty="0">
+                <a:solidFill>
+                  <a:srgbClr val="FFFFFF"/>
+                </a:solidFill>
+                <a:latin typeface="Calibri" pitchFamily="34" charset="0"/>
+                <a:ea typeface="Calibri" pitchFamily="34" charset="-122"/>
+                <a:cs typeface="Calibri" pitchFamily="34" charset="-120"/>
+              </a:rPr>
+              <a:t>WIN STORY</a:t>
+            </a:r>
+            <a:endParaRPr lang="en-US" sz="850" dirty="0"/>
+          </a:p>
+        </p:txBody>
+      </p:sp>
       <p:pic>
         <p:nvPicPr>
-          <p:cNvPr id="10" name="Image 1" descr="/home/user/dillon-os/02_FullTimeJob/AlignHCM/win-stories/world-central-kitchen/assets/align_logo.png">    </p:cNvPr>
+          <p:cNvPr id="9" name="Image 1" descr="/home/user/dillon-os/02_FullTimeJob/AlignHCM/win-stories/world-central-kitchen/assets/dayforce_logo.png">    </p:cNvPr>
           <p:cNvPicPr>
             <a:picLocks noChangeAspect="1"/>
           </p:cNvPicPr>
@@ -1125,7 +1086,31 @@
         </p:blipFill>
         <p:spPr>
           <a:xfrm>
-            <a:off x="9594799" y="548640"/>
+            <a:off x="10692079" y="690829"/>
+            <a:ext cx="932688" cy="392278"/>
+          </a:xfrm>
+          <a:prstGeom prst="rect">
+            <a:avLst/>
+          </a:prstGeom>
+        </p:spPr>
+      </p:pic>
+      <p:pic>
+        <p:nvPicPr>
+          <p:cNvPr id="10" name="Image 2" descr="/home/user/dillon-os/02_FullTimeJob/AlignHCM/win-stories/world-central-kitchen/assets/align_logo.png">    </p:cNvPr>
+          <p:cNvPicPr>
+            <a:picLocks noChangeAspect="1"/>
+          </p:cNvPicPr>
+          <p:nvPr/>
+        </p:nvPicPr>
+        <p:blipFill>
+          <a:blip r:embed="rId3"/>
+          <a:stretch>
+            <a:fillRect/>
+          </a:stretch>
+        </p:blipFill>
+        <p:spPr>
+          <a:xfrm>
+            <a:off x="9594799" y="658368"/>
             <a:ext cx="914400" cy="457200"/>
           </a:xfrm>
           <a:prstGeom prst="rect">
@@ -1135,7 +1120,7 @@
       </p:pic>
       <p:sp>
         <p:nvSpPr>
-          <p:cNvPr id="11" name="Shape 7"/>
+          <p:cNvPr id="11" name="Shape 6"/>
           <p:cNvSpPr/>
           <p:nvPr/>
         </p:nvSpPr>
@@ -1155,7 +1140,7 @@
       </p:sp>
       <p:sp>
         <p:nvSpPr>
-          <p:cNvPr id="12" name="Text 8"/>
+          <p:cNvPr id="12" name="Text 7"/>
           <p:cNvSpPr/>
           <p:nvPr/>
         </p:nvSpPr>
@@ -1194,7 +1179,7 @@
       </p:sp>
       <p:sp>
         <p:nvSpPr>
-          <p:cNvPr id="13" name="Text 9"/>
+          <p:cNvPr id="13" name="Text 8"/>
           <p:cNvSpPr/>
           <p:nvPr/>
         </p:nvSpPr>
@@ -1233,7 +1218,7 @@
       </p:sp>
       <p:sp>
         <p:nvSpPr>
-          <p:cNvPr id="14" name="Shape 10"/>
+          <p:cNvPr id="14" name="Shape 9"/>
           <p:cNvSpPr/>
           <p:nvPr/>
         </p:nvSpPr>
@@ -1256,7 +1241,7 @@
       </p:sp>
       <p:sp>
         <p:nvSpPr>
-          <p:cNvPr id="15" name="Text 11"/>
+          <p:cNvPr id="15" name="Text 10"/>
           <p:cNvSpPr/>
           <p:nvPr/>
         </p:nvSpPr>
@@ -1295,7 +1280,7 @@
       </p:sp>
       <p:sp>
         <p:nvSpPr>
-          <p:cNvPr id="16" name="Text 12"/>
+          <p:cNvPr id="16" name="Text 11"/>
           <p:cNvSpPr/>
           <p:nvPr/>
         </p:nvSpPr>
@@ -1334,7 +1319,7 @@
       </p:sp>
       <p:sp>
         <p:nvSpPr>
-          <p:cNvPr id="17" name="Shape 13"/>
+          <p:cNvPr id="17" name="Shape 12"/>
           <p:cNvSpPr/>
           <p:nvPr/>
         </p:nvSpPr>
@@ -1357,7 +1342,7 @@
       </p:sp>
       <p:sp>
         <p:nvSpPr>
-          <p:cNvPr id="18" name="Text 14"/>
+          <p:cNvPr id="18" name="Text 13"/>
           <p:cNvSpPr/>
           <p:nvPr/>
         </p:nvSpPr>
@@ -1396,7 +1381,7 @@
       </p:sp>
       <p:sp>
         <p:nvSpPr>
-          <p:cNvPr id="19" name="Text 15"/>
+          <p:cNvPr id="19" name="Text 14"/>
           <p:cNvSpPr/>
           <p:nvPr/>
         </p:nvSpPr>
@@ -1435,7 +1420,7 @@
       </p:sp>
       <p:sp>
         <p:nvSpPr>
-          <p:cNvPr id="20" name="Shape 16"/>
+          <p:cNvPr id="20" name="Shape 15"/>
           <p:cNvSpPr/>
           <p:nvPr/>
         </p:nvSpPr>
@@ -1458,7 +1443,7 @@
       </p:sp>
       <p:sp>
         <p:nvSpPr>
-          <p:cNvPr id="21" name="Text 17"/>
+          <p:cNvPr id="21" name="Text 16"/>
           <p:cNvSpPr/>
           <p:nvPr/>
         </p:nvSpPr>
@@ -1497,7 +1482,7 @@
       </p:sp>
       <p:sp>
         <p:nvSpPr>
-          <p:cNvPr id="22" name="Text 18"/>
+          <p:cNvPr id="22" name="Text 17"/>
           <p:cNvSpPr/>
           <p:nvPr/>
         </p:nvSpPr>
@@ -1536,7 +1521,7 @@
       </p:sp>
       <p:sp>
         <p:nvSpPr>
-          <p:cNvPr id="23" name="Shape 19"/>
+          <p:cNvPr id="23" name="Shape 18"/>
           <p:cNvSpPr/>
           <p:nvPr/>
         </p:nvSpPr>
@@ -1559,7 +1544,7 @@
       </p:sp>
       <p:sp>
         <p:nvSpPr>
-          <p:cNvPr id="24" name="Text 20"/>
+          <p:cNvPr id="24" name="Text 19"/>
           <p:cNvSpPr/>
           <p:nvPr/>
         </p:nvSpPr>
@@ -1598,7 +1583,7 @@
       </p:sp>
       <p:sp>
         <p:nvSpPr>
-          <p:cNvPr id="25" name="Text 21"/>
+          <p:cNvPr id="25" name="Text 20"/>
           <p:cNvSpPr/>
           <p:nvPr/>
         </p:nvSpPr>
@@ -1637,7 +1622,7 @@
       </p:sp>
       <p:sp>
         <p:nvSpPr>
-          <p:cNvPr id="26" name="Shape 22"/>
+          <p:cNvPr id="26" name="Shape 21"/>
           <p:cNvSpPr/>
           <p:nvPr/>
         </p:nvSpPr>
@@ -1660,7 +1645,7 @@
       </p:sp>
       <p:sp>
         <p:nvSpPr>
-          <p:cNvPr id="27" name="Text 23"/>
+          <p:cNvPr id="27" name="Text 22"/>
           <p:cNvSpPr/>
           <p:nvPr/>
         </p:nvSpPr>
@@ -1699,7 +1684,7 @@
       </p:sp>
       <p:sp>
         <p:nvSpPr>
-          <p:cNvPr id="28" name="Text 24"/>
+          <p:cNvPr id="28" name="Text 23"/>
           <p:cNvSpPr/>
           <p:nvPr/>
         </p:nvSpPr>
@@ -1738,7 +1723,7 @@
       </p:sp>
       <p:sp>
         <p:nvSpPr>
-          <p:cNvPr id="29" name="Shape 25"/>
+          <p:cNvPr id="29" name="Shape 24"/>
           <p:cNvSpPr/>
           <p:nvPr/>
         </p:nvSpPr>
@@ -1760,7 +1745,7 @@
       </p:sp>
       <p:sp>
         <p:nvSpPr>
-          <p:cNvPr id="30" name="Text 26"/>
+          <p:cNvPr id="30" name="Text 25"/>
           <p:cNvSpPr/>
           <p:nvPr/>
         </p:nvSpPr>
@@ -1799,7 +1784,7 @@
       </p:sp>
       <p:sp>
         <p:nvSpPr>
-          <p:cNvPr id="31" name="Text 27"/>
+          <p:cNvPr id="31" name="Text 26"/>
           <p:cNvSpPr/>
           <p:nvPr/>
         </p:nvSpPr>
@@ -1838,7 +1823,7 @@
       </p:sp>
       <p:sp>
         <p:nvSpPr>
-          <p:cNvPr id="32" name="Shape 28"/>
+          <p:cNvPr id="32" name="Shape 27"/>
           <p:cNvSpPr/>
           <p:nvPr/>
         </p:nvSpPr>
@@ -1865,7 +1850,7 @@
       </p:sp>
       <p:sp>
         <p:nvSpPr>
-          <p:cNvPr id="33" name="Text 29"/>
+          <p:cNvPr id="33" name="Text 28"/>
           <p:cNvSpPr/>
           <p:nvPr/>
         </p:nvSpPr>
@@ -1922,7 +1907,7 @@
                 <a:ea typeface="Calibri" pitchFamily="34" charset="-122"/>
                 <a:cs typeface="Calibri" pitchFamily="34" charset="-120"/>
               </a:rPr>
-              <a:t>WCK operated across BambooHR, Airtable, Gmail-based approvals, and A3innuva with no unified HR platform, creating data gaps, manual errors, and compliance exposure across 24 countries and multiple entity structures.</a:t>
+              <a:t>WCK operated across BambooHR, Airtable, Gmail-based approvals, and A3innuva with no unified HR platform -- creating data gaps, manual errors, and compliance exposure across 24 countries and multiple entity structures.</a:t>
             </a:r>
             <a:endParaRPr lang="en-US" sz="1050" dirty="0"/>
           </a:p>
@@ -1930,7 +1915,7 @@
       </p:sp>
       <p:sp>
         <p:nvSpPr>
-          <p:cNvPr id="34" name="Shape 30"/>
+          <p:cNvPr id="34" name="Shape 29"/>
           <p:cNvSpPr/>
           <p:nvPr/>
         </p:nvSpPr>
@@ -1957,7 +1942,7 @@
       </p:sp>
       <p:sp>
         <p:nvSpPr>
-          <p:cNvPr id="35" name="Text 31"/>
+          <p:cNvPr id="35" name="Text 30"/>
           <p:cNvSpPr/>
           <p:nvPr/>
         </p:nvSpPr>
@@ -2022,7 +2007,7 @@
       </p:sp>
       <p:sp>
         <p:nvSpPr>
-          <p:cNvPr id="36" name="Shape 32"/>
+          <p:cNvPr id="36" name="Shape 31"/>
           <p:cNvSpPr/>
           <p:nvPr/>
         </p:nvSpPr>
@@ -2049,7 +2034,7 @@
       </p:sp>
       <p:sp>
         <p:nvSpPr>
-          <p:cNvPr id="37" name="Text 33"/>
+          <p:cNvPr id="37" name="Text 32"/>
           <p:cNvSpPr/>
           <p:nvPr/>
         </p:nvSpPr>
@@ -2106,7 +2091,7 @@
                 <a:ea typeface="Calibri" pitchFamily="34" charset="-122"/>
                 <a:cs typeface="Calibri" pitchFamily="34" charset="-120"/>
               </a:rPr>
-              <a:t>A hard January 1 go-live date required simultaneous Sage Intacct integration from day one, leaving zero runway for a phased finance cutover. Bilingual (EN/ES) delivery was also required from the start.</a:t>
+              <a:t>A hard January 1 go-live date required simultaneous Sage Intacct integration from day one -- leaving zero runway for a phased finance cutover. Bilingual (EN/ES) delivery was also required from the start.</a:t>
             </a:r>
             <a:endParaRPr lang="en-US" sz="1050" dirty="0"/>
           </a:p>
@@ -2114,7 +2099,7 @@
       </p:sp>
       <p:sp>
         <p:nvSpPr>
-          <p:cNvPr id="38" name="Shape 34"/>
+          <p:cNvPr id="38" name="Shape 33"/>
           <p:cNvSpPr/>
           <p:nvPr/>
         </p:nvSpPr>
@@ -2136,7 +2121,7 @@
       </p:sp>
       <p:sp>
         <p:nvSpPr>
-          <p:cNvPr id="39" name="Text 35"/>
+          <p:cNvPr id="39" name="Text 34"/>
           <p:cNvSpPr/>
           <p:nvPr/>
         </p:nvSpPr>
@@ -2175,7 +2160,7 @@
       </p:sp>
       <p:sp>
         <p:nvSpPr>
-          <p:cNvPr id="40" name="Text 36"/>
+          <p:cNvPr id="40" name="Text 35"/>
           <p:cNvSpPr/>
           <p:nvPr/>
         </p:nvSpPr>
@@ -2214,7 +2199,7 @@
       </p:sp>
       <p:sp>
         <p:nvSpPr>
-          <p:cNvPr id="41" name="Shape 37"/>
+          <p:cNvPr id="41" name="Shape 36"/>
           <p:cNvSpPr/>
           <p:nvPr/>
         </p:nvSpPr>
@@ -2241,7 +2226,7 @@
       </p:sp>
       <p:sp>
         <p:nvSpPr>
-          <p:cNvPr id="42" name="Text 38"/>
+          <p:cNvPr id="42" name="Text 37"/>
           <p:cNvSpPr/>
           <p:nvPr/>
         </p:nvSpPr>
@@ -2298,7 +2283,7 @@
                 <a:ea typeface="Calibri" pitchFamily="34" charset="-122"/>
                 <a:cs typeface="Calibri" pitchFamily="34" charset="-120"/>
               </a:rPr>
-              <a:t>Align designed a scalable Relief Contractor onboarding workflow built for humanitarian surge operations: bilingual, field-deployable, and configured for multi-country compliance from day one. No other bidder offered this.</a:t>
+              <a:t>Align designed a scalable Relief Contractor onboarding workflow built for humanitarian surge operations -- bilingual, field-deployable, and configured for multi-country compliance from day one. No other bidder offered this.</a:t>
             </a:r>
             <a:endParaRPr lang="en-US" sz="1050" dirty="0"/>
           </a:p>
@@ -2306,7 +2291,7 @@
       </p:sp>
       <p:sp>
         <p:nvSpPr>
-          <p:cNvPr id="43" name="Shape 39"/>
+          <p:cNvPr id="43" name="Shape 38"/>
           <p:cNvSpPr/>
           <p:nvPr/>
         </p:nvSpPr>
@@ -2333,7 +2318,7 @@
       </p:sp>
       <p:sp>
         <p:nvSpPr>
-          <p:cNvPr id="44" name="Text 40"/>
+          <p:cNvPr id="44" name="Text 39"/>
           <p:cNvSpPr/>
           <p:nvPr/>
         </p:nvSpPr>
@@ -2390,35 +2375,15 @@
                 <a:ea typeface="Calibri" pitchFamily="34" charset="-122"/>
                 <a:cs typeface="Calibri" pitchFamily="34" charset="-120"/>
               </a:rPr>
-              <a:t>“Align HCM has clearly done its homework on WCK’s complexity... The RC surge onboarding model, bilingual delivery, Sage Intacct Day 1 integration, and the mission give-back commitment all stood out.”</a:t>
+              <a:t>"Align HCM has clearly done its homework on WCK's complexity... The RC surge onboarding model, bilingual delivery, Sage Intacct Day 1 integration, and the mission give-back commitment all stood out." -- Adam Reusing, WCK</a:t>
             </a:r>
             <a:endParaRPr lang="en-US" sz="1050" dirty="0"/>
           </a:p>
-          <a:p>
-            <a:pPr algn="l" indent="0" marL="0">
-              <a:lnSpc>
-                <a:spcPct val="98000"/>
-              </a:lnSpc>
-              <a:buNone/>
-            </a:pPr>
-            <a:r>
-              <a:rPr lang="en-US" sz="850" b="1" i="1" dirty="0">
-                <a:solidFill>
-                  <a:srgbClr val="C85A28"/>
-                </a:solidFill>
-                <a:latin typeface="Calibri" pitchFamily="34" charset="0"/>
-                <a:ea typeface="Calibri" pitchFamily="34" charset="-122"/>
-                <a:cs typeface="Calibri" pitchFamily="34" charset="-120"/>
-              </a:rPr>
-              <a:t>Adam Reusing, WCK</a:t>
-            </a:r>
-            <a:endParaRPr lang="en-US" sz="1050" dirty="0"/>
-          </a:p>
-        </p:txBody>
-      </p:sp>
-      <p:sp>
-        <p:nvSpPr>
-          <p:cNvPr id="45" name="Shape 41"/>
+        </p:txBody>
+      </p:sp>
+      <p:sp>
+        <p:nvSpPr>
+          <p:cNvPr id="45" name="Shape 40"/>
           <p:cNvSpPr/>
           <p:nvPr/>
         </p:nvSpPr>
@@ -2445,7 +2410,7 @@
       </p:sp>
       <p:sp>
         <p:nvSpPr>
-          <p:cNvPr id="46" name="Text 42"/>
+          <p:cNvPr id="46" name="Text 41"/>
           <p:cNvSpPr/>
           <p:nvPr/>
         </p:nvSpPr>
@@ -2502,7 +2467,7 @@
                 <a:ea typeface="Calibri" pitchFamily="34" charset="-122"/>
                 <a:cs typeface="Calibri" pitchFamily="34" charset="-120"/>
               </a:rPr>
-              <a:t>Align’s proven Sage Intacct integration capability directly resolved WCK’s highest-risk requirement. Paired with bilingual delivery, Align was the only vendor that could credibly commit to the full scope on the Jan 1 timeline.</a:t>
+              <a:t>Align's proven Sage Intacct integration capability directly resolved WCK's highest-risk requirement. Paired with bilingual delivery, Align was the only vendor that could credibly commit to the full scope on the Jan 1 timeline.</a:t>
             </a:r>
             <a:endParaRPr lang="en-US" sz="1050" dirty="0"/>
           </a:p>
@@ -2510,7 +2475,7 @@
       </p:sp>
       <p:sp>
         <p:nvSpPr>
-          <p:cNvPr id="47" name="Shape 43"/>
+          <p:cNvPr id="47" name="Shape 42"/>
           <p:cNvSpPr/>
           <p:nvPr/>
         </p:nvSpPr>
@@ -2532,7 +2497,7 @@
       </p:sp>
       <p:sp>
         <p:nvSpPr>
-          <p:cNvPr id="48" name="Text 44"/>
+          <p:cNvPr id="48" name="Text 43"/>
           <p:cNvSpPr/>
           <p:nvPr/>
         </p:nvSpPr>
@@ -2571,7 +2536,7 @@
       </p:sp>
       <p:sp>
         <p:nvSpPr>
-          <p:cNvPr id="49" name="Text 45"/>
+          <p:cNvPr id="49" name="Text 44"/>
           <p:cNvSpPr/>
           <p:nvPr/>
         </p:nvSpPr>
@@ -2610,7 +2575,7 @@
       </p:sp>
       <p:sp>
         <p:nvSpPr>
-          <p:cNvPr id="50" name="Shape 46"/>
+          <p:cNvPr id="50" name="Shape 45"/>
           <p:cNvSpPr/>
           <p:nvPr/>
         </p:nvSpPr>
@@ -2637,7 +2602,7 @@
       </p:sp>
       <p:sp>
         <p:nvSpPr>
-          <p:cNvPr id="51" name="Text 47"/>
+          <p:cNvPr id="51" name="Text 46"/>
           <p:cNvSpPr/>
           <p:nvPr/>
         </p:nvSpPr>
@@ -2702,7 +2667,7 @@
       </p:sp>
       <p:sp>
         <p:nvSpPr>
-          <p:cNvPr id="52" name="Shape 48"/>
+          <p:cNvPr id="52" name="Shape 47"/>
           <p:cNvSpPr/>
           <p:nvPr/>
         </p:nvSpPr>
@@ -2729,7 +2694,7 @@
       </p:sp>
       <p:sp>
         <p:nvSpPr>
-          <p:cNvPr id="53" name="Text 49"/>
+          <p:cNvPr id="53" name="Text 48"/>
           <p:cNvSpPr/>
           <p:nvPr/>
         </p:nvSpPr>
@@ -2786,7 +2751,7 @@
                 <a:ea typeface="Calibri" pitchFamily="34" charset="-122"/>
                 <a:cs typeface="Calibri" pitchFamily="34" charset="-120"/>
               </a:rPr>
-              <a:t>Align and WCK co-developed a detailed Implementation Solutions Design and Statement of Work across 8+ working sessions. WCK had line-by-line ownership of scope, timeline, and deliverables. A depth of collaboration no competitor came close to replicating.</a:t>
+              <a:t>Align and WCK co-developed a detailed Implementation Solutions Design and Statement of Work across 8+ working sessions. WCK had line-by-line ownership of scope, timeline, and deliverables -- a depth of collaboration no competitor came close to replicating.</a:t>
             </a:r>
             <a:endParaRPr lang="en-US" sz="1050" dirty="0"/>
           </a:p>
@@ -2794,7 +2759,7 @@
       </p:sp>
       <p:sp>
         <p:nvSpPr>
-          <p:cNvPr id="54" name="Shape 50"/>
+          <p:cNvPr id="54" name="Shape 49"/>
           <p:cNvSpPr/>
           <p:nvPr/>
         </p:nvSpPr>
@@ -2821,7 +2786,7 @@
       </p:sp>
       <p:sp>
         <p:nvSpPr>
-          <p:cNvPr id="55" name="Text 51"/>
+          <p:cNvPr id="55" name="Text 50"/>
           <p:cNvSpPr/>
           <p:nvPr/>
         </p:nvSpPr>
@@ -2878,7 +2843,7 @@
                 <a:ea typeface="Calibri" pitchFamily="34" charset="-122"/>
                 <a:cs typeface="Calibri" pitchFamily="34" charset="-120"/>
               </a:rPr>
-              <a:t>Align demonstrated flexibility on both commercial terms and rate structure. Willingness to adapt without compromising delivery quality sealed the partnership.</a:t>
+              <a:t>Align demonstrated flexibility on both commercial terms and rate structure Willingness to adapt without compromising delivery quality sealed the partnership.</a:t>
             </a:r>
             <a:endParaRPr lang="en-US" sz="1050" dirty="0"/>
           </a:p>

--- a/02_FullTimeJob/AlignHCM/win-stories/world-central-kitchen/WCK_Win_Story.pptx
+++ b/02_FullTimeJob/AlignHCM/win-stories/world-central-kitchen/WCK_Win_Story.pptx
@@ -1009,70 +1009,9 @@
           </a:p>
         </p:txBody>
       </p:sp>
-      <p:sp>
-        <p:nvSpPr>
-          <p:cNvPr id="7" name="Shape 4"/>
-          <p:cNvSpPr/>
-          <p:nvPr/>
-        </p:nvSpPr>
-        <p:spPr>
-          <a:xfrm>
-            <a:off x="10692079" y="365760"/>
-            <a:ext cx="932688" cy="219456"/>
-          </a:xfrm>
-          <a:prstGeom prst="roundRect">
-            <a:avLst>
-              <a:gd name="adj" fmla="val 20833"/>
-            </a:avLst>
-          </a:prstGeom>
-          <a:solidFill>
-            <a:srgbClr val="E0652F"/>
-          </a:solidFill>
-          <a:ln/>
-        </p:spPr>
-      </p:sp>
-      <p:sp>
-        <p:nvSpPr>
-          <p:cNvPr id="8" name="Text 5"/>
-          <p:cNvSpPr/>
-          <p:nvPr/>
-        </p:nvSpPr>
-        <p:spPr>
-          <a:xfrm>
-            <a:off x="10692079" y="365760"/>
-            <a:ext cx="932688" cy="219456"/>
-          </a:xfrm>
-          <a:prstGeom prst="rect">
-            <a:avLst/>
-          </a:prstGeom>
-          <a:noFill/>
-          <a:ln/>
-        </p:spPr>
-        <p:txBody>
-          <a:bodyPr wrap="square" lIns="0" tIns="0" rIns="0" bIns="0" rtlCol="0" anchor="ctr"/>
-          <a:lstStyle/>
-          <a:p>
-            <a:pPr algn="ctr" indent="0" marL="0">
-              <a:buNone/>
-            </a:pPr>
-            <a:r>
-              <a:rPr lang="en-US" sz="850" b="1" spc="100" kern="0" dirty="0">
-                <a:solidFill>
-                  <a:srgbClr val="FFFFFF"/>
-                </a:solidFill>
-                <a:latin typeface="Calibri" pitchFamily="34" charset="0"/>
-                <a:ea typeface="Calibri" pitchFamily="34" charset="-122"/>
-                <a:cs typeface="Calibri" pitchFamily="34" charset="-120"/>
-              </a:rPr>
-              <a:t>WIN STORY</a:t>
-            </a:r>
-            <a:endParaRPr lang="en-US" sz="850" dirty="0"/>
-          </a:p>
-        </p:txBody>
-      </p:sp>
       <p:pic>
         <p:nvPicPr>
-          <p:cNvPr id="9" name="Image 1" descr="/home/user/dillon-os/02_FullTimeJob/AlignHCM/win-stories/world-central-kitchen/assets/dayforce_logo.png">    </p:cNvPr>
+          <p:cNvPr id="7" name="Image 1" descr="/home/user/dillon-os/02_FullTimeJob/AlignHCM/win-stories/world-central-kitchen/assets/align_logo.png">    </p:cNvPr>
           <p:cNvPicPr>
             <a:picLocks noChangeAspect="1"/>
           </p:cNvPicPr>
@@ -1086,8 +1025,8 @@
         </p:blipFill>
         <p:spPr>
           <a:xfrm>
-            <a:off x="10692079" y="690829"/>
-            <a:ext cx="932688" cy="392278"/>
+            <a:off x="9223406" y="704088"/>
+            <a:ext cx="986784" cy="420624"/>
           </a:xfrm>
           <a:prstGeom prst="rect">
             <a:avLst/>
@@ -1096,7 +1035,7 @@
       </p:pic>
       <p:pic>
         <p:nvPicPr>
-          <p:cNvPr id="10" name="Image 2" descr="/home/user/dillon-os/02_FullTimeJob/AlignHCM/win-stories/world-central-kitchen/assets/align_logo.png">    </p:cNvPr>
+          <p:cNvPr id="8" name="Image 2" descr="/home/user/dillon-os/02_FullTimeJob/AlignHCM/win-stories/world-central-kitchen/assets/dayforce_logo.png">    </p:cNvPr>
           <p:cNvPicPr>
             <a:picLocks noChangeAspect="1"/>
           </p:cNvPicPr>
@@ -1110,14 +1049,75 @@
         </p:blipFill>
         <p:spPr>
           <a:xfrm>
-            <a:off x="9594799" y="658368"/>
-            <a:ext cx="914400" cy="457200"/>
+            <a:off x="10502798" y="777274"/>
+            <a:ext cx="1121969" cy="274253"/>
           </a:xfrm>
           <a:prstGeom prst="rect">
             <a:avLst/>
           </a:prstGeom>
         </p:spPr>
       </p:pic>
+      <p:sp>
+        <p:nvSpPr>
+          <p:cNvPr id="9" name="Shape 4"/>
+          <p:cNvSpPr/>
+          <p:nvPr/>
+        </p:nvSpPr>
+        <p:spPr>
+          <a:xfrm>
+            <a:off x="9957743" y="384048"/>
+            <a:ext cx="932688" cy="219456"/>
+          </a:xfrm>
+          <a:prstGeom prst="roundRect">
+            <a:avLst>
+              <a:gd name="adj" fmla="val 20833"/>
+            </a:avLst>
+          </a:prstGeom>
+          <a:solidFill>
+            <a:srgbClr val="E0652F"/>
+          </a:solidFill>
+          <a:ln/>
+        </p:spPr>
+      </p:sp>
+      <p:sp>
+        <p:nvSpPr>
+          <p:cNvPr id="10" name="Text 5"/>
+          <p:cNvSpPr/>
+          <p:nvPr/>
+        </p:nvSpPr>
+        <p:spPr>
+          <a:xfrm>
+            <a:off x="9957743" y="384048"/>
+            <a:ext cx="932688" cy="219456"/>
+          </a:xfrm>
+          <a:prstGeom prst="rect">
+            <a:avLst/>
+          </a:prstGeom>
+          <a:noFill/>
+          <a:ln/>
+        </p:spPr>
+        <p:txBody>
+          <a:bodyPr wrap="square" lIns="0" tIns="0" rIns="0" bIns="0" rtlCol="0" anchor="ctr"/>
+          <a:lstStyle/>
+          <a:p>
+            <a:pPr algn="ctr" indent="0" marL="0">
+              <a:buNone/>
+            </a:pPr>
+            <a:r>
+              <a:rPr lang="en-US" sz="850" b="1" spc="100" kern="0" dirty="0">
+                <a:solidFill>
+                  <a:srgbClr val="FFFFFF"/>
+                </a:solidFill>
+                <a:latin typeface="Calibri" pitchFamily="34" charset="0"/>
+                <a:ea typeface="Calibri" pitchFamily="34" charset="-122"/>
+                <a:cs typeface="Calibri" pitchFamily="34" charset="-120"/>
+              </a:rPr>
+              <a:t>WIN STORY</a:t>
+            </a:r>
+            <a:endParaRPr lang="en-US" sz="850" dirty="0"/>
+          </a:p>
+        </p:txBody>
+      </p:sp>
       <p:sp>
         <p:nvSpPr>
           <p:cNvPr id="11" name="Shape 6"/>

--- a/02_FullTimeJob/AlignHCM/win-stories/world-central-kitchen/WCK_Win_Story.pptx
+++ b/02_FullTimeJob/AlignHCM/win-stories/world-central-kitchen/WCK_Win_Story.pptx
@@ -1009,9 +1009,70 @@
           </a:p>
         </p:txBody>
       </p:sp>
+      <p:sp>
+        <p:nvSpPr>
+          <p:cNvPr id="7" name="Shape 4"/>
+          <p:cNvSpPr/>
+          <p:nvPr/>
+        </p:nvSpPr>
+        <p:spPr>
+          <a:xfrm>
+            <a:off x="10692079" y="301752"/>
+            <a:ext cx="932688" cy="219456"/>
+          </a:xfrm>
+          <a:prstGeom prst="roundRect">
+            <a:avLst>
+              <a:gd name="adj" fmla="val 20833"/>
+            </a:avLst>
+          </a:prstGeom>
+          <a:solidFill>
+            <a:srgbClr val="E0652F"/>
+          </a:solidFill>
+          <a:ln/>
+        </p:spPr>
+      </p:sp>
+      <p:sp>
+        <p:nvSpPr>
+          <p:cNvPr id="8" name="Text 5"/>
+          <p:cNvSpPr/>
+          <p:nvPr/>
+        </p:nvSpPr>
+        <p:spPr>
+          <a:xfrm>
+            <a:off x="10692079" y="301752"/>
+            <a:ext cx="932688" cy="219456"/>
+          </a:xfrm>
+          <a:prstGeom prst="rect">
+            <a:avLst/>
+          </a:prstGeom>
+          <a:noFill/>
+          <a:ln/>
+        </p:spPr>
+        <p:txBody>
+          <a:bodyPr wrap="square" lIns="0" tIns="0" rIns="0" bIns="0" rtlCol="0" anchor="ctr"/>
+          <a:lstStyle/>
+          <a:p>
+            <a:pPr algn="ctr" indent="0" marL="0">
+              <a:buNone/>
+            </a:pPr>
+            <a:r>
+              <a:rPr lang="en-US" sz="850" b="1" spc="100" kern="0" dirty="0">
+                <a:solidFill>
+                  <a:srgbClr val="FFFFFF"/>
+                </a:solidFill>
+                <a:latin typeface="Calibri" pitchFamily="34" charset="0"/>
+                <a:ea typeface="Calibri" pitchFamily="34" charset="-122"/>
+                <a:cs typeface="Calibri" pitchFamily="34" charset="-120"/>
+              </a:rPr>
+              <a:t>WIN STORY</a:t>
+            </a:r>
+            <a:endParaRPr lang="en-US" sz="850" dirty="0"/>
+          </a:p>
+        </p:txBody>
+      </p:sp>
       <p:pic>
         <p:nvPicPr>
-          <p:cNvPr id="7" name="Image 1" descr="/home/user/dillon-os/02_FullTimeJob/AlignHCM/win-stories/world-central-kitchen/assets/align_logo.png">    </p:cNvPr>
+          <p:cNvPr id="9" name="Image 1" descr="/home/user/dillon-os/02_FullTimeJob/AlignHCM/win-stories/world-central-kitchen/assets/align_logo.png">    </p:cNvPr>
           <p:cNvPicPr>
             <a:picLocks noChangeAspect="1"/>
           </p:cNvPicPr>
@@ -1025,7 +1086,7 @@
         </p:blipFill>
         <p:spPr>
           <a:xfrm>
-            <a:off x="9223406" y="704088"/>
+            <a:off x="9223406" y="758952"/>
             <a:ext cx="986784" cy="420624"/>
           </a:xfrm>
           <a:prstGeom prst="rect">
@@ -1035,7 +1096,7 @@
       </p:pic>
       <p:pic>
         <p:nvPicPr>
-          <p:cNvPr id="8" name="Image 2" descr="/home/user/dillon-os/02_FullTimeJob/AlignHCM/win-stories/world-central-kitchen/assets/dayforce_logo.png">    </p:cNvPr>
+          <p:cNvPr id="10" name="Image 2" descr="/home/user/dillon-os/02_FullTimeJob/AlignHCM/win-stories/world-central-kitchen/assets/dayforce_logo.png">    </p:cNvPr>
           <p:cNvPicPr>
             <a:picLocks noChangeAspect="1"/>
           </p:cNvPicPr>
@@ -1049,7 +1110,7 @@
         </p:blipFill>
         <p:spPr>
           <a:xfrm>
-            <a:off x="10502798" y="777274"/>
+            <a:off x="10502798" y="832138"/>
             <a:ext cx="1121969" cy="274253"/>
           </a:xfrm>
           <a:prstGeom prst="rect">
@@ -1057,67 +1118,6 @@
           </a:prstGeom>
         </p:spPr>
       </p:pic>
-      <p:sp>
-        <p:nvSpPr>
-          <p:cNvPr id="9" name="Shape 4"/>
-          <p:cNvSpPr/>
-          <p:nvPr/>
-        </p:nvSpPr>
-        <p:spPr>
-          <a:xfrm>
-            <a:off x="9957743" y="384048"/>
-            <a:ext cx="932688" cy="219456"/>
-          </a:xfrm>
-          <a:prstGeom prst="roundRect">
-            <a:avLst>
-              <a:gd name="adj" fmla="val 20833"/>
-            </a:avLst>
-          </a:prstGeom>
-          <a:solidFill>
-            <a:srgbClr val="E0652F"/>
-          </a:solidFill>
-          <a:ln/>
-        </p:spPr>
-      </p:sp>
-      <p:sp>
-        <p:nvSpPr>
-          <p:cNvPr id="10" name="Text 5"/>
-          <p:cNvSpPr/>
-          <p:nvPr/>
-        </p:nvSpPr>
-        <p:spPr>
-          <a:xfrm>
-            <a:off x="9957743" y="384048"/>
-            <a:ext cx="932688" cy="219456"/>
-          </a:xfrm>
-          <a:prstGeom prst="rect">
-            <a:avLst/>
-          </a:prstGeom>
-          <a:noFill/>
-          <a:ln/>
-        </p:spPr>
-        <p:txBody>
-          <a:bodyPr wrap="square" lIns="0" tIns="0" rIns="0" bIns="0" rtlCol="0" anchor="ctr"/>
-          <a:lstStyle/>
-          <a:p>
-            <a:pPr algn="ctr" indent="0" marL="0">
-              <a:buNone/>
-            </a:pPr>
-            <a:r>
-              <a:rPr lang="en-US" sz="850" b="1" spc="100" kern="0" dirty="0">
-                <a:solidFill>
-                  <a:srgbClr val="FFFFFF"/>
-                </a:solidFill>
-                <a:latin typeface="Calibri" pitchFamily="34" charset="0"/>
-                <a:ea typeface="Calibri" pitchFamily="34" charset="-122"/>
-                <a:cs typeface="Calibri" pitchFamily="34" charset="-120"/>
-              </a:rPr>
-              <a:t>WIN STORY</a:t>
-            </a:r>
-            <a:endParaRPr lang="en-US" sz="850" dirty="0"/>
-          </a:p>
-        </p:txBody>
-      </p:sp>
       <p:sp>
         <p:nvSpPr>
           <p:cNvPr id="11" name="Shape 6"/>

--- a/02_FullTimeJob/AlignHCM/win-stories/world-central-kitchen/WCK_Win_Story.pptx
+++ b/02_FullTimeJob/AlignHCM/win-stories/world-central-kitchen/WCK_Win_Story.pptx
@@ -1017,7 +1017,7 @@
         </p:nvSpPr>
         <p:spPr>
           <a:xfrm>
-            <a:off x="10692079" y="301752"/>
+            <a:off x="10692079" y="402336"/>
             <a:ext cx="932688" cy="219456"/>
           </a:xfrm>
           <a:prstGeom prst="roundRect">
@@ -1039,7 +1039,7 @@
         </p:nvSpPr>
         <p:spPr>
           <a:xfrm>
-            <a:off x="10692079" y="301752"/>
+            <a:off x="10692079" y="402336"/>
             <a:ext cx="932688" cy="219456"/>
           </a:xfrm>
           <a:prstGeom prst="rect">
